--- a/docs/presentaciones/classes/clase-232-portafolio-publico-en-github-pages-y-presentacion-presentacion.pptx
+++ b/docs/presentaciones/classes/clase-232-portafolio-publico-en-github-pages-y-presentacion-presentacion.pptx
@@ -3272,7 +3272,7 @@
                 </a:solidFill>
                 <a:latin typeface="Segoe UI"/>
               </a:rPr>
-              <a:t>Parte: 8 — Capstones · Fuentes: Chip Huyen, How to build a data science portfolio + Eugene Yan, What I learned from looking at 200 ML portfolios + Mitchell et al., Model Cards for Model Reporting (FAT* 2019).  Duración estimada: 150 min.</a:t>
+              <a:t>Parte: 8 — Capstones · Fuentes: Chip Huyen, How to build a data science portfolio + Eugene Yan, What I learned from looking at 200 ML portfolios + Mitchell et al., Model Cards for Model Reporting (FAT* 2019).  Duración estimada: 150 min. · Nivel: Avanzado</a:t>
             </a:r>
           </a:p>
         </p:txBody>
@@ -3581,7 +3581,7 @@
                 </a:solidFill>
                 <a:latin typeface="Segoe UI"/>
               </a:rPr>
-              <a:t>Parte: 8 — Capstones · Fuentes: Chip Huyen, How to build a data science portfolio + Eugene Yan, What I learned from looking at 200 ML portfolios + Mitchell et al., Model Cards for Model Reporting (FAT* 2019).  Duración estimada: 150 min.</a:t>
+              <a:t>Parte: 8 — Capstones · Fuentes: Chip Huyen, How to build a data science portfolio + Eugene Yan, What I learned from looking at 200 ML portfolios + Mitchell et al., Model Cards for Model Reporting (FAT* 2019).  Duración estimada: 150 min. · Nivel: Avanzado</a:t>
             </a:r>
           </a:p>
         </p:txBody>
